--- a/docs/presentation.pptx
+++ b/docs/presentation.pptx
@@ -5,21 +5,21 @@
     <p:sldMasterId id="2147483648" r:id="rId1"/>
   </p:sldMasterIdLst>
   <p:sldIdLst>
-    <p:sldId id="256" r:id="rId7"/>
-    <p:sldId id="257" r:id="rId8"/>
-    <p:sldId id="258" r:id="rId9"/>
-    <p:sldId id="259" r:id="rId10"/>
-    <p:sldId id="260" r:id="rId11"/>
-    <p:sldId id="261" r:id="rId12"/>
-    <p:sldId id="262" r:id="rId13"/>
-    <p:sldId id="263" r:id="rId14"/>
-    <p:sldId id="264" r:id="rId15"/>
-    <p:sldId id="265" r:id="rId16"/>
-    <p:sldId id="266" r:id="rId17"/>
-    <p:sldId id="267" r:id="rId18"/>
-    <p:sldId id="268" r:id="rId19"/>
+    <p:sldId id="256" r:id="rId2"/>
+    <p:sldId id="257" r:id="rId3"/>
+    <p:sldId id="258" r:id="rId4"/>
+    <p:sldId id="259" r:id="rId5"/>
+    <p:sldId id="260" r:id="rId6"/>
+    <p:sldId id="261" r:id="rId7"/>
+    <p:sldId id="262" r:id="rId8"/>
+    <p:sldId id="263" r:id="rId9"/>
+    <p:sldId id="264" r:id="rId10"/>
+    <p:sldId id="265" r:id="rId11"/>
+    <p:sldId id="266" r:id="rId12"/>
+    <p:sldId id="267" r:id="rId13"/>
+    <p:sldId id="268" r:id="rId14"/>
   </p:sldIdLst>
-  <p:sldSz cx="9144000" cy="5143500" type="screen4x3"/>
+  <p:sldSz cx="9144000" cy="5143500" type="screen16x9"/>
   <p:notesSz cx="6858000" cy="9144000"/>
   <p:defaultTextStyle>
     <a:defPPr>
@@ -116,6 +116,22 @@
       </a:defRPr>
     </a:lvl9pPr>
   </p:defaultTextStyle>
+  <p:extLst>
+    <p:ext uri="{EFAFB233-063F-42B5-8137-9DF3F51BA10A}">
+      <p15:sldGuideLst xmlns:p15="http://schemas.microsoft.com/office/powerpoint/2012/main">
+        <p15:guide id="1" orient="horz" pos="2160">
+          <p15:clr>
+            <a:srgbClr val="A4A3A4"/>
+          </p15:clr>
+        </p15:guide>
+        <p15:guide id="2" pos="2880">
+          <p15:clr>
+            <a:srgbClr val="A4A3A4"/>
+          </p15:clr>
+        </p15:guide>
+      </p15:sldGuideLst>
+    </p:ext>
+  </p:extLst>
 </p:presentation>
 </file>
 
@@ -157,10 +173,9 @@
           <a:lstStyle/>
           <a:p>
             <a:r>
-              <a:rPr lang="en-US" smtClean="0"/>
+              <a:rPr lang="en-US"/>
               <a:t>Click to edit Master title style</a:t>
             </a:r>
-            <a:endParaRPr lang="en-US"/>
           </a:p>
         </p:txBody>
       </p:sp>
@@ -276,10 +291,9 @@
           </a:lstStyle>
           <a:p>
             <a:r>
-              <a:rPr lang="en-US" smtClean="0"/>
+              <a:rPr lang="en-US"/>
               <a:t>Click to edit Master subtitle style</a:t>
             </a:r>
-            <a:endParaRPr lang="en-US"/>
           </a:p>
         </p:txBody>
       </p:sp>
@@ -300,7 +314,7 @@
           <a:p>
             <a:fld id="{5BCAD085-E8A6-8845-BD4E-CB4CCA059FC4}" type="datetimeFigureOut">
               <a:rPr lang="en-US" smtClean="0"/>
-              <a:t>1/27/13</a:t>
+              <a:t>3/20/2026</a:t>
             </a:fld>
             <a:endParaRPr lang="en-US"/>
           </a:p>
@@ -394,10 +408,9 @@
           <a:lstStyle/>
           <a:p>
             <a:r>
-              <a:rPr lang="en-US" smtClean="0"/>
+              <a:rPr lang="en-US"/>
               <a:t>Click to edit Master title style</a:t>
             </a:r>
-            <a:endParaRPr lang="en-US"/>
           </a:p>
         </p:txBody>
       </p:sp>
@@ -418,38 +431,37 @@
           <a:p>
             <a:pPr lvl="0"/>
             <a:r>
-              <a:rPr lang="en-US" smtClean="0"/>
+              <a:rPr lang="en-US"/>
               <a:t>Click to edit Master text styles</a:t>
             </a:r>
           </a:p>
           <a:p>
             <a:pPr lvl="1"/>
             <a:r>
-              <a:rPr lang="en-US" smtClean="0"/>
+              <a:rPr lang="en-US"/>
               <a:t>Second level</a:t>
             </a:r>
           </a:p>
           <a:p>
             <a:pPr lvl="2"/>
             <a:r>
-              <a:rPr lang="en-US" smtClean="0"/>
+              <a:rPr lang="en-US"/>
               <a:t>Third level</a:t>
             </a:r>
           </a:p>
           <a:p>
             <a:pPr lvl="3"/>
             <a:r>
-              <a:rPr lang="en-US" smtClean="0"/>
+              <a:rPr lang="en-US"/>
               <a:t>Fourth level</a:t>
             </a:r>
           </a:p>
           <a:p>
             <a:pPr lvl="4"/>
             <a:r>
-              <a:rPr lang="en-US" smtClean="0"/>
+              <a:rPr lang="en-US"/>
               <a:t>Fifth level</a:t>
             </a:r>
-            <a:endParaRPr lang="en-US"/>
           </a:p>
         </p:txBody>
       </p:sp>
@@ -470,7 +482,7 @@
           <a:p>
             <a:fld id="{5BCAD085-E8A6-8845-BD4E-CB4CCA059FC4}" type="datetimeFigureOut">
               <a:rPr lang="en-US" smtClean="0"/>
-              <a:t>1/27/13</a:t>
+              <a:t>3/20/2026</a:t>
             </a:fld>
             <a:endParaRPr lang="en-US"/>
           </a:p>
@@ -569,10 +581,9 @@
           <a:lstStyle/>
           <a:p>
             <a:r>
-              <a:rPr lang="en-US" smtClean="0"/>
+              <a:rPr lang="en-US"/>
               <a:t>Click to edit Master title style</a:t>
             </a:r>
-            <a:endParaRPr lang="en-US"/>
           </a:p>
         </p:txBody>
       </p:sp>
@@ -598,38 +609,37 @@
           <a:p>
             <a:pPr lvl="0"/>
             <a:r>
-              <a:rPr lang="en-US" smtClean="0"/>
+              <a:rPr lang="en-US"/>
               <a:t>Click to edit Master text styles</a:t>
             </a:r>
           </a:p>
           <a:p>
             <a:pPr lvl="1"/>
             <a:r>
-              <a:rPr lang="en-US" smtClean="0"/>
+              <a:rPr lang="en-US"/>
               <a:t>Second level</a:t>
             </a:r>
           </a:p>
           <a:p>
             <a:pPr lvl="2"/>
             <a:r>
-              <a:rPr lang="en-US" smtClean="0"/>
+              <a:rPr lang="en-US"/>
               <a:t>Third level</a:t>
             </a:r>
           </a:p>
           <a:p>
             <a:pPr lvl="3"/>
             <a:r>
-              <a:rPr lang="en-US" smtClean="0"/>
+              <a:rPr lang="en-US"/>
               <a:t>Fourth level</a:t>
             </a:r>
           </a:p>
           <a:p>
             <a:pPr lvl="4"/>
             <a:r>
-              <a:rPr lang="en-US" smtClean="0"/>
+              <a:rPr lang="en-US"/>
               <a:t>Fifth level</a:t>
             </a:r>
-            <a:endParaRPr lang="en-US"/>
           </a:p>
         </p:txBody>
       </p:sp>
@@ -650,7 +660,7 @@
           <a:p>
             <a:fld id="{5BCAD085-E8A6-8845-BD4E-CB4CCA059FC4}" type="datetimeFigureOut">
               <a:rPr lang="en-US" smtClean="0"/>
-              <a:t>1/27/13</a:t>
+              <a:t>3/20/2026</a:t>
             </a:fld>
             <a:endParaRPr lang="en-US"/>
           </a:p>
@@ -744,10 +754,9 @@
           <a:lstStyle/>
           <a:p>
             <a:r>
-              <a:rPr lang="en-US" smtClean="0"/>
+              <a:rPr lang="en-US"/>
               <a:t>Click to edit Master title style</a:t>
             </a:r>
-            <a:endParaRPr lang="en-US"/>
           </a:p>
         </p:txBody>
       </p:sp>
@@ -768,38 +777,37 @@
           <a:p>
             <a:pPr lvl="0"/>
             <a:r>
-              <a:rPr lang="en-US" smtClean="0"/>
+              <a:rPr lang="en-US"/>
               <a:t>Click to edit Master text styles</a:t>
             </a:r>
           </a:p>
           <a:p>
             <a:pPr lvl="1"/>
             <a:r>
-              <a:rPr lang="en-US" smtClean="0"/>
+              <a:rPr lang="en-US"/>
               <a:t>Second level</a:t>
             </a:r>
           </a:p>
           <a:p>
             <a:pPr lvl="2"/>
             <a:r>
-              <a:rPr lang="en-US" smtClean="0"/>
+              <a:rPr lang="en-US"/>
               <a:t>Third level</a:t>
             </a:r>
           </a:p>
           <a:p>
             <a:pPr lvl="3"/>
             <a:r>
-              <a:rPr lang="en-US" smtClean="0"/>
+              <a:rPr lang="en-US"/>
               <a:t>Fourth level</a:t>
             </a:r>
           </a:p>
           <a:p>
             <a:pPr lvl="4"/>
             <a:r>
-              <a:rPr lang="en-US" smtClean="0"/>
+              <a:rPr lang="en-US"/>
               <a:t>Fifth level</a:t>
             </a:r>
-            <a:endParaRPr lang="en-US"/>
           </a:p>
         </p:txBody>
       </p:sp>
@@ -820,7 +828,7 @@
           <a:p>
             <a:fld id="{5BCAD085-E8A6-8845-BD4E-CB4CCA059FC4}" type="datetimeFigureOut">
               <a:rPr lang="en-US" smtClean="0"/>
-              <a:t>1/27/13</a:t>
+              <a:t>3/20/2026</a:t>
             </a:fld>
             <a:endParaRPr lang="en-US"/>
           </a:p>
@@ -923,10 +931,9 @@
           </a:lstStyle>
           <a:p>
             <a:r>
-              <a:rPr lang="en-US" smtClean="0"/>
+              <a:rPr lang="en-US"/>
               <a:t>Click to edit Master title style</a:t>
             </a:r>
-            <a:endParaRPr lang="en-US"/>
           </a:p>
         </p:txBody>
       </p:sp>
@@ -1043,7 +1050,7 @@
           <a:p>
             <a:pPr lvl="0"/>
             <a:r>
-              <a:rPr lang="en-US" smtClean="0"/>
+              <a:rPr lang="en-US"/>
               <a:t>Click to edit Master text styles</a:t>
             </a:r>
           </a:p>
@@ -1066,7 +1073,7 @@
           <a:p>
             <a:fld id="{5BCAD085-E8A6-8845-BD4E-CB4CCA059FC4}" type="datetimeFigureOut">
               <a:rPr lang="en-US" smtClean="0"/>
-              <a:t>1/27/13</a:t>
+              <a:t>3/20/2026</a:t>
             </a:fld>
             <a:endParaRPr lang="en-US"/>
           </a:p>
@@ -1160,10 +1167,9 @@
           <a:lstStyle/>
           <a:p>
             <a:r>
-              <a:rPr lang="en-US" smtClean="0"/>
+              <a:rPr lang="en-US"/>
               <a:t>Click to edit Master title style</a:t>
             </a:r>
-            <a:endParaRPr lang="en-US"/>
           </a:p>
         </p:txBody>
       </p:sp>
@@ -1217,38 +1223,37 @@
           <a:p>
             <a:pPr lvl="0"/>
             <a:r>
-              <a:rPr lang="en-US" smtClean="0"/>
+              <a:rPr lang="en-US"/>
               <a:t>Click to edit Master text styles</a:t>
             </a:r>
           </a:p>
           <a:p>
             <a:pPr lvl="1"/>
             <a:r>
-              <a:rPr lang="en-US" smtClean="0"/>
+              <a:rPr lang="en-US"/>
               <a:t>Second level</a:t>
             </a:r>
           </a:p>
           <a:p>
             <a:pPr lvl="2"/>
             <a:r>
-              <a:rPr lang="en-US" smtClean="0"/>
+              <a:rPr lang="en-US"/>
               <a:t>Third level</a:t>
             </a:r>
           </a:p>
           <a:p>
             <a:pPr lvl="3"/>
             <a:r>
-              <a:rPr lang="en-US" smtClean="0"/>
+              <a:rPr lang="en-US"/>
               <a:t>Fourth level</a:t>
             </a:r>
           </a:p>
           <a:p>
             <a:pPr lvl="4"/>
             <a:r>
-              <a:rPr lang="en-US" smtClean="0"/>
+              <a:rPr lang="en-US"/>
               <a:t>Fifth level</a:t>
             </a:r>
-            <a:endParaRPr lang="en-US"/>
           </a:p>
         </p:txBody>
       </p:sp>
@@ -1302,38 +1307,37 @@
           <a:p>
             <a:pPr lvl="0"/>
             <a:r>
-              <a:rPr lang="en-US" smtClean="0"/>
+              <a:rPr lang="en-US"/>
               <a:t>Click to edit Master text styles</a:t>
             </a:r>
           </a:p>
           <a:p>
             <a:pPr lvl="1"/>
             <a:r>
-              <a:rPr lang="en-US" smtClean="0"/>
+              <a:rPr lang="en-US"/>
               <a:t>Second level</a:t>
             </a:r>
           </a:p>
           <a:p>
             <a:pPr lvl="2"/>
             <a:r>
-              <a:rPr lang="en-US" smtClean="0"/>
+              <a:rPr lang="en-US"/>
               <a:t>Third level</a:t>
             </a:r>
           </a:p>
           <a:p>
             <a:pPr lvl="3"/>
             <a:r>
-              <a:rPr lang="en-US" smtClean="0"/>
+              <a:rPr lang="en-US"/>
               <a:t>Fourth level</a:t>
             </a:r>
           </a:p>
           <a:p>
             <a:pPr lvl="4"/>
             <a:r>
-              <a:rPr lang="en-US" smtClean="0"/>
+              <a:rPr lang="en-US"/>
               <a:t>Fifth level</a:t>
             </a:r>
-            <a:endParaRPr lang="en-US"/>
           </a:p>
         </p:txBody>
       </p:sp>
@@ -1354,7 +1358,7 @@
           <a:p>
             <a:fld id="{5BCAD085-E8A6-8845-BD4E-CB4CCA059FC4}" type="datetimeFigureOut">
               <a:rPr lang="en-US" smtClean="0"/>
-              <a:t>1/27/13</a:t>
+              <a:t>3/20/2026</a:t>
             </a:fld>
             <a:endParaRPr lang="en-US"/>
           </a:p>
@@ -1452,10 +1456,9 @@
           </a:lstStyle>
           <a:p>
             <a:r>
-              <a:rPr lang="en-US" smtClean="0"/>
+              <a:rPr lang="en-US"/>
               <a:t>Click to edit Master title style</a:t>
             </a:r>
-            <a:endParaRPr lang="en-US"/>
           </a:p>
         </p:txBody>
       </p:sp>
@@ -1518,7 +1521,7 @@
           <a:p>
             <a:pPr lvl="0"/>
             <a:r>
-              <a:rPr lang="en-US" smtClean="0"/>
+              <a:rPr lang="en-US"/>
               <a:t>Click to edit Master text styles</a:t>
             </a:r>
           </a:p>
@@ -1574,38 +1577,37 @@
           <a:p>
             <a:pPr lvl="0"/>
             <a:r>
-              <a:rPr lang="en-US" smtClean="0"/>
+              <a:rPr lang="en-US"/>
               <a:t>Click to edit Master text styles</a:t>
             </a:r>
           </a:p>
           <a:p>
             <a:pPr lvl="1"/>
             <a:r>
-              <a:rPr lang="en-US" smtClean="0"/>
+              <a:rPr lang="en-US"/>
               <a:t>Second level</a:t>
             </a:r>
           </a:p>
           <a:p>
             <a:pPr lvl="2"/>
             <a:r>
-              <a:rPr lang="en-US" smtClean="0"/>
+              <a:rPr lang="en-US"/>
               <a:t>Third level</a:t>
             </a:r>
           </a:p>
           <a:p>
             <a:pPr lvl="3"/>
             <a:r>
-              <a:rPr lang="en-US" smtClean="0"/>
+              <a:rPr lang="en-US"/>
               <a:t>Fourth level</a:t>
             </a:r>
           </a:p>
           <a:p>
             <a:pPr lvl="4"/>
             <a:r>
-              <a:rPr lang="en-US" smtClean="0"/>
+              <a:rPr lang="en-US"/>
               <a:t>Fifth level</a:t>
             </a:r>
-            <a:endParaRPr lang="en-US"/>
           </a:p>
         </p:txBody>
       </p:sp>
@@ -1668,7 +1670,7 @@
           <a:p>
             <a:pPr lvl="0"/>
             <a:r>
-              <a:rPr lang="en-US" smtClean="0"/>
+              <a:rPr lang="en-US"/>
               <a:t>Click to edit Master text styles</a:t>
             </a:r>
           </a:p>
@@ -1724,38 +1726,37 @@
           <a:p>
             <a:pPr lvl="0"/>
             <a:r>
-              <a:rPr lang="en-US" smtClean="0"/>
+              <a:rPr lang="en-US"/>
               <a:t>Click to edit Master text styles</a:t>
             </a:r>
           </a:p>
           <a:p>
             <a:pPr lvl="1"/>
             <a:r>
-              <a:rPr lang="en-US" smtClean="0"/>
+              <a:rPr lang="en-US"/>
               <a:t>Second level</a:t>
             </a:r>
           </a:p>
           <a:p>
             <a:pPr lvl="2"/>
             <a:r>
-              <a:rPr lang="en-US" smtClean="0"/>
+              <a:rPr lang="en-US"/>
               <a:t>Third level</a:t>
             </a:r>
           </a:p>
           <a:p>
             <a:pPr lvl="3"/>
             <a:r>
-              <a:rPr lang="en-US" smtClean="0"/>
+              <a:rPr lang="en-US"/>
               <a:t>Fourth level</a:t>
             </a:r>
           </a:p>
           <a:p>
             <a:pPr lvl="4"/>
             <a:r>
-              <a:rPr lang="en-US" smtClean="0"/>
+              <a:rPr lang="en-US"/>
               <a:t>Fifth level</a:t>
             </a:r>
-            <a:endParaRPr lang="en-US"/>
           </a:p>
         </p:txBody>
       </p:sp>
@@ -1776,7 +1777,7 @@
           <a:p>
             <a:fld id="{5BCAD085-E8A6-8845-BD4E-CB4CCA059FC4}" type="datetimeFigureOut">
               <a:rPr lang="en-US" smtClean="0"/>
-              <a:t>1/27/13</a:t>
+              <a:t>3/20/2026</a:t>
             </a:fld>
             <a:endParaRPr lang="en-US"/>
           </a:p>
@@ -1870,10 +1871,9 @@
           <a:lstStyle/>
           <a:p>
             <a:r>
-              <a:rPr lang="en-US" smtClean="0"/>
+              <a:rPr lang="en-US"/>
               <a:t>Click to edit Master title style</a:t>
             </a:r>
-            <a:endParaRPr lang="en-US"/>
           </a:p>
         </p:txBody>
       </p:sp>
@@ -1894,7 +1894,7 @@
           <a:p>
             <a:fld id="{5BCAD085-E8A6-8845-BD4E-CB4CCA059FC4}" type="datetimeFigureOut">
               <a:rPr lang="en-US" smtClean="0"/>
-              <a:t>1/27/13</a:t>
+              <a:t>3/20/2026</a:t>
             </a:fld>
             <a:endParaRPr lang="en-US"/>
           </a:p>
@@ -1989,7 +1989,7 @@
           <a:p>
             <a:fld id="{5BCAD085-E8A6-8845-BD4E-CB4CCA059FC4}" type="datetimeFigureOut">
               <a:rPr lang="en-US" smtClean="0"/>
-              <a:t>1/27/13</a:t>
+              <a:t>3/20/2026</a:t>
             </a:fld>
             <a:endParaRPr lang="en-US"/>
           </a:p>
@@ -2092,10 +2092,9 @@
           </a:lstStyle>
           <a:p>
             <a:r>
-              <a:rPr lang="en-US" smtClean="0"/>
+              <a:rPr lang="en-US"/>
               <a:t>Click to edit Master title style</a:t>
             </a:r>
-            <a:endParaRPr lang="en-US"/>
           </a:p>
         </p:txBody>
       </p:sp>
@@ -2149,38 +2148,37 @@
           <a:p>
             <a:pPr lvl="0"/>
             <a:r>
-              <a:rPr lang="en-US" smtClean="0"/>
+              <a:rPr lang="en-US"/>
               <a:t>Click to edit Master text styles</a:t>
             </a:r>
           </a:p>
           <a:p>
             <a:pPr lvl="1"/>
             <a:r>
-              <a:rPr lang="en-US" smtClean="0"/>
+              <a:rPr lang="en-US"/>
               <a:t>Second level</a:t>
             </a:r>
           </a:p>
           <a:p>
             <a:pPr lvl="2"/>
             <a:r>
-              <a:rPr lang="en-US" smtClean="0"/>
+              <a:rPr lang="en-US"/>
               <a:t>Third level</a:t>
             </a:r>
           </a:p>
           <a:p>
             <a:pPr lvl="3"/>
             <a:r>
-              <a:rPr lang="en-US" smtClean="0"/>
+              <a:rPr lang="en-US"/>
               <a:t>Fourth level</a:t>
             </a:r>
           </a:p>
           <a:p>
             <a:pPr lvl="4"/>
             <a:r>
-              <a:rPr lang="en-US" smtClean="0"/>
+              <a:rPr lang="en-US"/>
               <a:t>Fifth level</a:t>
             </a:r>
-            <a:endParaRPr lang="en-US"/>
           </a:p>
         </p:txBody>
       </p:sp>
@@ -2243,7 +2241,7 @@
           <a:p>
             <a:pPr lvl="0"/>
             <a:r>
-              <a:rPr lang="en-US" smtClean="0"/>
+              <a:rPr lang="en-US"/>
               <a:t>Click to edit Master text styles</a:t>
             </a:r>
           </a:p>
@@ -2266,7 +2264,7 @@
           <a:p>
             <a:fld id="{5BCAD085-E8A6-8845-BD4E-CB4CCA059FC4}" type="datetimeFigureOut">
               <a:rPr lang="en-US" smtClean="0"/>
-              <a:t>1/27/13</a:t>
+              <a:t>3/20/2026</a:t>
             </a:fld>
             <a:endParaRPr lang="en-US"/>
           </a:p>
@@ -2369,10 +2367,9 @@
           </a:lstStyle>
           <a:p>
             <a:r>
-              <a:rPr lang="en-US" smtClean="0"/>
+              <a:rPr lang="en-US"/>
               <a:t>Click to edit Master title style</a:t>
             </a:r>
-            <a:endParaRPr lang="en-US"/>
           </a:p>
         </p:txBody>
       </p:sp>
@@ -2496,7 +2493,7 @@
           <a:p>
             <a:pPr lvl="0"/>
             <a:r>
-              <a:rPr lang="en-US" smtClean="0"/>
+              <a:rPr lang="en-US"/>
               <a:t>Click to edit Master text styles</a:t>
             </a:r>
           </a:p>
@@ -2519,7 +2516,7 @@
           <a:p>
             <a:fld id="{5BCAD085-E8A6-8845-BD4E-CB4CCA059FC4}" type="datetimeFigureOut">
               <a:rPr lang="en-US" smtClean="0"/>
-              <a:t>1/27/13</a:t>
+              <a:t>3/20/2026</a:t>
             </a:fld>
             <a:endParaRPr lang="en-US"/>
           </a:p>
@@ -2628,10 +2625,9 @@
           <a:lstStyle/>
           <a:p>
             <a:r>
-              <a:rPr lang="en-US" smtClean="0"/>
+              <a:rPr lang="en-US"/>
               <a:t>Click to edit Master title style</a:t>
             </a:r>
-            <a:endParaRPr lang="en-US"/>
           </a:p>
         </p:txBody>
       </p:sp>
@@ -2662,38 +2658,37 @@
           <a:p>
             <a:pPr lvl="0"/>
             <a:r>
-              <a:rPr lang="en-US" smtClean="0"/>
+              <a:rPr lang="en-US"/>
               <a:t>Click to edit Master text styles</a:t>
             </a:r>
           </a:p>
           <a:p>
             <a:pPr lvl="1"/>
             <a:r>
-              <a:rPr lang="en-US" smtClean="0"/>
+              <a:rPr lang="en-US"/>
               <a:t>Second level</a:t>
             </a:r>
           </a:p>
           <a:p>
             <a:pPr lvl="2"/>
             <a:r>
-              <a:rPr lang="en-US" smtClean="0"/>
+              <a:rPr lang="en-US"/>
               <a:t>Third level</a:t>
             </a:r>
           </a:p>
           <a:p>
             <a:pPr lvl="3"/>
             <a:r>
-              <a:rPr lang="en-US" smtClean="0"/>
+              <a:rPr lang="en-US"/>
               <a:t>Fourth level</a:t>
             </a:r>
           </a:p>
           <a:p>
             <a:pPr lvl="4"/>
             <a:r>
-              <a:rPr lang="en-US" smtClean="0"/>
+              <a:rPr lang="en-US"/>
               <a:t>Fifth level</a:t>
             </a:r>
-            <a:endParaRPr lang="en-US"/>
           </a:p>
         </p:txBody>
       </p:sp>
@@ -2732,7 +2727,7 @@
           <a:p>
             <a:fld id="{5BCAD085-E8A6-8845-BD4E-CB4CCA059FC4}" type="datetimeFigureOut">
               <a:rPr lang="en-US" smtClean="0"/>
-              <a:t>1/27/13</a:t>
+              <a:t>3/20/2026</a:t>
             </a:fld>
             <a:endParaRPr lang="en-US"/>
           </a:p>
@@ -3091,7 +3086,7 @@
 </file>
 
 <file path=ppt/slides/slide1.xml><?xml version="1.0" encoding="utf-8"?>
-<p:sld xmlns:a="http://schemas.openxmlformats.org/drawingml/2006/main" xmlns:p="http://schemas.openxmlformats.org/presentationml/2006/main" xmlns:r="http://schemas.openxmlformats.org/officeDocument/2006/relationships">
+<p:sld xmlns:a="http://schemas.openxmlformats.org/drawingml/2006/main" xmlns:r="http://schemas.openxmlformats.org/officeDocument/2006/relationships" xmlns:p="http://schemas.openxmlformats.org/presentationml/2006/main">
   <p:cSld>
     <p:bg>
       <p:bgPr>
@@ -3107,7 +3102,14 @@
         <p:cNvGrpSpPr/>
         <p:nvPr/>
       </p:nvGrpSpPr>
-      <p:grpSpPr/>
+      <p:grpSpPr>
+        <a:xfrm>
+          <a:off x="0" y="0"/>
+          <a:ext cx="0" cy="0"/>
+          <a:chOff x="0" y="0"/>
+          <a:chExt cx="0" cy="0"/>
+        </a:xfrm>
+      </p:grpSpPr>
       <p:sp>
         <p:nvSpPr>
           <p:cNvPr id="2" name="TextBox 1"/>
@@ -3292,7 +3294,7 @@
 </file>
 
 <file path=ppt/slides/slide10.xml><?xml version="1.0" encoding="utf-8"?>
-<p:sld xmlns:a="http://schemas.openxmlformats.org/drawingml/2006/main" xmlns:p="http://schemas.openxmlformats.org/presentationml/2006/main" xmlns:r="http://schemas.openxmlformats.org/officeDocument/2006/relationships">
+<p:sld xmlns:a="http://schemas.openxmlformats.org/drawingml/2006/main" xmlns:r="http://schemas.openxmlformats.org/officeDocument/2006/relationships" xmlns:p="http://schemas.openxmlformats.org/presentationml/2006/main">
   <p:cSld>
     <p:bg>
       <p:bgPr>
@@ -3308,7 +3310,14 @@
         <p:cNvGrpSpPr/>
         <p:nvPr/>
       </p:nvGrpSpPr>
-      <p:grpSpPr/>
+      <p:grpSpPr>
+        <a:xfrm>
+          <a:off x="0" y="0"/>
+          <a:ext cx="0" cy="0"/>
+          <a:chOff x="0" y="0"/>
+          <a:chExt cx="0" cy="0"/>
+        </a:xfrm>
+      </p:grpSpPr>
       <p:sp>
         <p:nvSpPr>
           <p:cNvPr id="2" name="TextBox 1"/>
@@ -3384,6 +3393,7 @@
           <a:lstStyle/>
           <a:p>
             <a:pPr algn="ctr"/>
+            <a:endParaRPr/>
           </a:p>
         </p:txBody>
       </p:sp>
@@ -3424,7 +3434,7 @@
           </a:fontRef>
         </p:style>
         <p:txBody>
-          <a:bodyPr rtlCol="0" anchor="ctr" wrap="square" lIns="152400" rIns="152400" tIns="101600" bIns="101600"/>
+          <a:bodyPr wrap="square" lIns="152400" tIns="101600" rIns="152400" bIns="101600" rtlCol="0" anchor="ctr"/>
           <a:lstStyle/>
           <a:p>
             <a:pPr algn="ctr">
@@ -3438,36 +3448,55 @@
               </a:defRPr>
             </a:pPr>
             <a:r>
-              <a:t>Testing (pytest)</a:t>
-            </a:r>
-          </a:p>
-          <a:p>
-            <a:pPr>
-              <a:spcBef>
-                <a:spcPts val="200"/>
-              </a:spcBef>
-              <a:defRPr sz="1200">
-                <a:solidFill>
-                  <a:srgbClr val="BBBBBB"/>
-                </a:solidFill>
-              </a:defRPr>
-            </a:pPr>
-            <a:r>
-              <a:t>81% line coverage (pytest-cov)</a:t>
-            </a:r>
-          </a:p>
-          <a:p>
-            <a:pPr>
-              <a:spcBef>
-                <a:spcPts val="200"/>
-              </a:spcBef>
-              <a:defRPr sz="1200">
-                <a:solidFill>
-                  <a:srgbClr val="BBBBBB"/>
-                </a:solidFill>
-              </a:defRPr>
-            </a:pPr>
-            <a:r>
+              <a:rPr dirty="0"/>
+              <a:t>Testing (</a:t>
+            </a:r>
+            <a:r>
+              <a:rPr dirty="0" err="1"/>
+              <a:t>pytest</a:t>
+            </a:r>
+            <a:r>
+              <a:rPr dirty="0"/>
+              <a:t>)</a:t>
+            </a:r>
+          </a:p>
+          <a:p>
+            <a:pPr>
+              <a:spcBef>
+                <a:spcPts val="200"/>
+              </a:spcBef>
+              <a:defRPr sz="1200">
+                <a:solidFill>
+                  <a:srgbClr val="BBBBBB"/>
+                </a:solidFill>
+              </a:defRPr>
+            </a:pPr>
+            <a:r>
+              <a:rPr dirty="0"/>
+              <a:t>81% line coverage (</a:t>
+            </a:r>
+            <a:r>
+              <a:rPr dirty="0" err="1"/>
+              <a:t>pytest-cov</a:t>
+            </a:r>
+            <a:r>
+              <a:rPr dirty="0"/>
+              <a:t>)</a:t>
+            </a:r>
+          </a:p>
+          <a:p>
+            <a:pPr>
+              <a:spcBef>
+                <a:spcPts val="200"/>
+              </a:spcBef>
+              <a:defRPr sz="1200">
+                <a:solidFill>
+                  <a:srgbClr val="BBBBBB"/>
+                </a:solidFill>
+              </a:defRPr>
+            </a:pPr>
+            <a:r>
+              <a:rPr dirty="0"/>
               <a:t>Isolated DB fixtures per test</a:t>
             </a:r>
           </a:p>
@@ -3482,19 +3511,21 @@
                 </a:solidFill>
               </a:defRPr>
             </a:pPr>
-          </a:p>
-          <a:p>
-            <a:pPr>
-              <a:spcBef>
-                <a:spcPts val="200"/>
-              </a:spcBef>
-              <a:defRPr sz="1200">
-                <a:solidFill>
-                  <a:srgbClr val="BBBBBB"/>
-                </a:solidFill>
-              </a:defRPr>
-            </a:pPr>
-            <a:r>
+            <a:endParaRPr dirty="0"/>
+          </a:p>
+          <a:p>
+            <a:pPr>
+              <a:spcBef>
+                <a:spcPts val="200"/>
+              </a:spcBef>
+              <a:defRPr sz="1200">
+                <a:solidFill>
+                  <a:srgbClr val="BBBBBB"/>
+                </a:solidFill>
+              </a:defRPr>
+            </a:pPr>
+            <a:r>
+              <a:rPr dirty="0"/>
               <a:t>Covers:</a:t>
             </a:r>
           </a:p>
@@ -3510,67 +3541,76 @@
               </a:defRPr>
             </a:pPr>
             <a:r>
-              <a:t>  Incident API permissions</a:t>
-            </a:r>
-          </a:p>
-          <a:p>
-            <a:pPr>
-              <a:spcBef>
-                <a:spcPts val="200"/>
-              </a:spcBef>
-              <a:defRPr sz="1200">
-                <a:solidFill>
-                  <a:srgbClr val="BBBBBB"/>
-                </a:solidFill>
-              </a:defRPr>
-            </a:pPr>
-            <a:r>
-              <a:t>  Station &amp; route lookups</a:t>
-            </a:r>
-          </a:p>
-          <a:p>
-            <a:pPr>
-              <a:spcBef>
-                <a:spcPts val="200"/>
-              </a:spcBef>
-              <a:defRPr sz="1200">
-                <a:solidFill>
-                  <a:srgbClr val="BBBBBB"/>
-                </a:solidFill>
-              </a:defRPr>
-            </a:pPr>
-            <a:r>
-              <a:t>  Analytics endpoints</a:t>
-            </a:r>
-          </a:p>
-          <a:p>
-            <a:pPr>
-              <a:spcBef>
-                <a:spcPts val="200"/>
-              </a:spcBef>
-              <a:defRPr sz="1200">
-                <a:solidFill>
-                  <a:srgbClr val="BBBBBB"/>
-                </a:solidFill>
-              </a:defRPr>
-            </a:pPr>
-            <a:r>
-              <a:t>  Import services &amp; Darwin parsing</a:t>
-            </a:r>
-          </a:p>
-          <a:p>
-            <a:pPr>
-              <a:spcBef>
-                <a:spcPts val="200"/>
-              </a:spcBef>
-              <a:defRPr sz="1200">
-                <a:solidFill>
-                  <a:srgbClr val="BBBBBB"/>
-                </a:solidFill>
-              </a:defRPr>
-            </a:pPr>
-            <a:r>
-              <a:t>  MCP tools &amp; security</a:t>
+              <a:rPr dirty="0"/>
+              <a:t>Incident API permissions</a:t>
+            </a:r>
+          </a:p>
+          <a:p>
+            <a:pPr>
+              <a:spcBef>
+                <a:spcPts val="200"/>
+              </a:spcBef>
+              <a:defRPr sz="1200">
+                <a:solidFill>
+                  <a:srgbClr val="BBBBBB"/>
+                </a:solidFill>
+              </a:defRPr>
+            </a:pPr>
+            <a:r>
+              <a:rPr dirty="0"/>
+              <a:t>Station &amp; route lookups</a:t>
+            </a:r>
+          </a:p>
+          <a:p>
+            <a:pPr>
+              <a:spcBef>
+                <a:spcPts val="200"/>
+              </a:spcBef>
+              <a:defRPr sz="1200">
+                <a:solidFill>
+                  <a:srgbClr val="BBBBBB"/>
+                </a:solidFill>
+              </a:defRPr>
+            </a:pPr>
+            <a:r>
+              <a:rPr dirty="0"/>
+              <a:t>Analytics endpoints</a:t>
+            </a:r>
+          </a:p>
+          <a:p>
+            <a:pPr>
+              <a:spcBef>
+                <a:spcPts val="200"/>
+              </a:spcBef>
+              <a:defRPr sz="1200">
+                <a:solidFill>
+                  <a:srgbClr val="BBBBBB"/>
+                </a:solidFill>
+              </a:defRPr>
+            </a:pPr>
+            <a:r>
+              <a:rPr dirty="0"/>
+              <a:t>Import services &amp; Darwin parsing</a:t>
+            </a:r>
+            <a:r>
+              <a:rPr lang="en-GB" dirty="0"/>
+              <a:t> </a:t>
+            </a:r>
+          </a:p>
+          <a:p>
+            <a:pPr>
+              <a:spcBef>
+                <a:spcPts val="200"/>
+              </a:spcBef>
+              <a:defRPr sz="1200">
+                <a:solidFill>
+                  <a:srgbClr val="BBBBBB"/>
+                </a:solidFill>
+              </a:defRPr>
+            </a:pPr>
+            <a:r>
+              <a:rPr dirty="0"/>
+              <a:t>MCP tools &amp; security</a:t>
             </a:r>
           </a:p>
         </p:txBody>
@@ -3612,7 +3652,7 @@
           </a:fontRef>
         </p:style>
         <p:txBody>
-          <a:bodyPr rtlCol="0" anchor="ctr" wrap="square" lIns="152400" rIns="152400" tIns="101600" bIns="101600"/>
+          <a:bodyPr wrap="square" lIns="152400" tIns="101600" rIns="152400" bIns="101600" rtlCol="0" anchor="ctr"/>
           <a:lstStyle/>
           <a:p>
             <a:pPr algn="ctr">
@@ -3700,6 +3740,7 @@
                 </a:solidFill>
               </a:defRPr>
             </a:pPr>
+            <a:endParaRPr/>
           </a:p>
           <a:p>
             <a:pPr>
@@ -3742,6 +3783,7 @@
                 </a:solidFill>
               </a:defRPr>
             </a:pPr>
+            <a:endParaRPr/>
           </a:p>
           <a:p>
             <a:pPr>
@@ -3769,7 +3811,7 @@
 </file>
 
 <file path=ppt/slides/slide11.xml><?xml version="1.0" encoding="utf-8"?>
-<p:sld xmlns:a="http://schemas.openxmlformats.org/drawingml/2006/main" xmlns:p="http://schemas.openxmlformats.org/presentationml/2006/main" xmlns:r="http://schemas.openxmlformats.org/officeDocument/2006/relationships">
+<p:sld xmlns:a="http://schemas.openxmlformats.org/drawingml/2006/main" xmlns:r="http://schemas.openxmlformats.org/officeDocument/2006/relationships" xmlns:p="http://schemas.openxmlformats.org/presentationml/2006/main">
   <p:cSld>
     <p:bg>
       <p:bgPr>
@@ -3785,7 +3827,14 @@
         <p:cNvGrpSpPr/>
         <p:nvPr/>
       </p:nvGrpSpPr>
-      <p:grpSpPr/>
+      <p:grpSpPr>
+        <a:xfrm>
+          <a:off x="0" y="0"/>
+          <a:ext cx="0" cy="0"/>
+          <a:chOff x="0" y="0"/>
+          <a:chExt cx="0" cy="0"/>
+        </a:xfrm>
+      </p:grpSpPr>
       <p:sp>
         <p:nvSpPr>
           <p:cNvPr id="2" name="TextBox 1"/>
@@ -3861,6 +3910,7 @@
           <a:lstStyle/>
           <a:p>
             <a:pPr algn="ctr"/>
+            <a:endParaRPr/>
           </a:p>
         </p:txBody>
       </p:sp>
@@ -3901,7 +3951,7 @@
           </a:fontRef>
         </p:style>
         <p:txBody>
-          <a:bodyPr rtlCol="0" anchor="ctr" wrap="square" lIns="152400" rIns="152400" tIns="101600" bIns="101600"/>
+          <a:bodyPr wrap="square" lIns="152400" tIns="101600" rIns="152400" bIns="101600" rtlCol="0" anchor="ctr"/>
           <a:lstStyle/>
           <a:p>
             <a:pPr algn="ctr">
@@ -4032,7 +4082,7 @@
           </a:fontRef>
         </p:style>
         <p:txBody>
-          <a:bodyPr rtlCol="0" anchor="ctr" wrap="square" lIns="152400" rIns="152400" tIns="101600" bIns="101600"/>
+          <a:bodyPr wrap="square" lIns="152400" tIns="101600" rIns="152400" bIns="101600" rtlCol="0" anchor="ctr"/>
           <a:lstStyle/>
           <a:p>
             <a:pPr algn="ctr">
@@ -4046,6 +4096,7 @@
               </a:defRPr>
             </a:pPr>
             <a:r>
+              <a:rPr dirty="0"/>
               <a:t>Deliverables</a:t>
             </a:r>
           </a:p>
@@ -4061,6 +4112,7 @@
               </a:defRPr>
             </a:pPr>
             <a:r>
+              <a:rPr dirty="0"/>
               <a:t>Technical report (5-page PDF)</a:t>
             </a:r>
           </a:p>
@@ -4076,6 +4128,7 @@
               </a:defRPr>
             </a:pPr>
             <a:r>
+              <a:rPr dirty="0"/>
               <a:t>API documentation (Swagger PDF)</a:t>
             </a:r>
           </a:p>
@@ -4091,6 +4144,7 @@
               </a:defRPr>
             </a:pPr>
             <a:r>
+              <a:rPr dirty="0"/>
               <a:t>Presentation slides (this file)</a:t>
             </a:r>
           </a:p>
@@ -4106,22 +4160,16 @@
               </a:defRPr>
             </a:pPr>
             <a:r>
+              <a:rPr dirty="0"/>
               <a:t>GenAI conversation logs</a:t>
             </a:r>
-          </a:p>
-          <a:p>
-            <a:pPr>
-              <a:spcBef>
-                <a:spcPts val="200"/>
-              </a:spcBef>
-              <a:defRPr sz="1200">
-                <a:solidFill>
-                  <a:srgbClr val="BBBBBB"/>
-                </a:solidFill>
-              </a:defRPr>
-            </a:pPr>
-            <a:r>
-              <a:t>  (ChatGPT + Cursor exports)</a:t>
+            <a:r>
+              <a:rPr lang="en-GB" dirty="0"/>
+              <a:t> </a:t>
+            </a:r>
+            <a:r>
+              <a:rPr dirty="0"/>
+              <a:t> (ChatGPT + Cursor exports)</a:t>
             </a:r>
           </a:p>
         </p:txBody>
@@ -4163,7 +4211,7 @@
           </a:fontRef>
         </p:style>
         <p:txBody>
-          <a:bodyPr rtlCol="0" anchor="ctr" wrap="square" lIns="152400" rIns="152400" tIns="101600" bIns="101600"/>
+          <a:bodyPr wrap="square" lIns="152400" tIns="101600" rIns="152400" bIns="101600" rtlCol="0" anchor="ctr"/>
           <a:lstStyle/>
           <a:p>
             <a:pPr algn="ctr">
@@ -4236,7 +4284,7 @@
 </file>
 
 <file path=ppt/slides/slide12.xml><?xml version="1.0" encoding="utf-8"?>
-<p:sld xmlns:a="http://schemas.openxmlformats.org/drawingml/2006/main" xmlns:p="http://schemas.openxmlformats.org/presentationml/2006/main" xmlns:r="http://schemas.openxmlformats.org/officeDocument/2006/relationships">
+<p:sld xmlns:a="http://schemas.openxmlformats.org/drawingml/2006/main" xmlns:r="http://schemas.openxmlformats.org/officeDocument/2006/relationships" xmlns:p="http://schemas.openxmlformats.org/presentationml/2006/main">
   <p:cSld>
     <p:bg>
       <p:bgPr>
@@ -4252,7 +4300,14 @@
         <p:cNvGrpSpPr/>
         <p:nvPr/>
       </p:nvGrpSpPr>
-      <p:grpSpPr/>
+      <p:grpSpPr>
+        <a:xfrm>
+          <a:off x="0" y="0"/>
+          <a:ext cx="0" cy="0"/>
+          <a:chOff x="0" y="0"/>
+          <a:chExt cx="0" cy="0"/>
+        </a:xfrm>
+      </p:grpSpPr>
       <p:sp>
         <p:nvSpPr>
           <p:cNvPr id="2" name="TextBox 1"/>
@@ -4328,6 +4383,7 @@
           <a:lstStyle/>
           <a:p>
             <a:pPr algn="ctr"/>
+            <a:endParaRPr/>
           </a:p>
         </p:txBody>
       </p:sp>
@@ -4368,7 +4424,7 @@
           </a:fontRef>
         </p:style>
         <p:txBody>
-          <a:bodyPr rtlCol="0" anchor="ctr" wrap="square" lIns="152400" rIns="152400" tIns="101600" bIns="101600"/>
+          <a:bodyPr wrap="square" lIns="152400" tIns="101600" rIns="152400" bIns="101600" rtlCol="0" anchor="ctr"/>
           <a:lstStyle/>
           <a:p>
             <a:pPr algn="ctr">
@@ -4484,7 +4540,7 @@
           </a:fontRef>
         </p:style>
         <p:txBody>
-          <a:bodyPr rtlCol="0" anchor="ctr" wrap="square" lIns="152400" rIns="152400" tIns="101600" bIns="101600"/>
+          <a:bodyPr wrap="square" lIns="152400" tIns="101600" rIns="152400" bIns="101600" rtlCol="0" anchor="ctr"/>
           <a:lstStyle/>
           <a:p>
             <a:pPr algn="ctr">
@@ -4498,6 +4554,7 @@
               </a:defRPr>
             </a:pPr>
             <a:r>
+              <a:rPr dirty="0"/>
               <a:t>Limitations</a:t>
             </a:r>
           </a:p>
@@ -4513,21 +4570,23 @@
               </a:defRPr>
             </a:pPr>
             <a:r>
-              <a:t>Short time window (~days, not months)</a:t>
-            </a:r>
-          </a:p>
-          <a:p>
-            <a:pPr>
-              <a:spcBef>
-                <a:spcPts val="200"/>
-              </a:spcBef>
-              <a:defRPr sz="1200">
-                <a:solidFill>
-                  <a:srgbClr val="BBBBBB"/>
-                </a:solidFill>
-              </a:defRPr>
-            </a:pPr>
-            <a:r>
+              <a:rPr dirty="0"/>
+              <a:t>Short time window (days, not months)</a:t>
+            </a:r>
+          </a:p>
+          <a:p>
+            <a:pPr>
+              <a:spcBef>
+                <a:spcPts val="200"/>
+              </a:spcBef>
+              <a:defRPr sz="1200">
+                <a:solidFill>
+                  <a:srgbClr val="BBBBBB"/>
+                </a:solidFill>
+              </a:defRPr>
+            </a:pPr>
+            <a:r>
+              <a:rPr dirty="0"/>
               <a:t>Basic authentication model</a:t>
             </a:r>
           </a:p>
@@ -4543,6 +4602,7 @@
               </a:defRPr>
             </a:pPr>
             <a:r>
+              <a:rPr dirty="0"/>
               <a:t>No long-term trend analysis</a:t>
             </a:r>
           </a:p>
@@ -4558,6 +4618,7 @@
               </a:defRPr>
             </a:pPr>
             <a:r>
+              <a:rPr dirty="0"/>
               <a:t>Security not production-grade</a:t>
             </a:r>
           </a:p>
@@ -4600,7 +4661,7 @@
           </a:fontRef>
         </p:style>
         <p:txBody>
-          <a:bodyPr rtlCol="0" anchor="ctr" wrap="square" lIns="152400" rIns="152400" tIns="101600" bIns="101600"/>
+          <a:bodyPr wrap="square" lIns="152400" tIns="101600" rIns="152400" bIns="101600" rtlCol="0" anchor="ctr"/>
           <a:lstStyle/>
           <a:p>
             <a:pPr algn="ctr">
@@ -4673,7 +4734,7 @@
 </file>
 
 <file path=ppt/slides/slide13.xml><?xml version="1.0" encoding="utf-8"?>
-<p:sld xmlns:a="http://schemas.openxmlformats.org/drawingml/2006/main" xmlns:p="http://schemas.openxmlformats.org/presentationml/2006/main" xmlns:r="http://schemas.openxmlformats.org/officeDocument/2006/relationships">
+<p:sld xmlns:a="http://schemas.openxmlformats.org/drawingml/2006/main" xmlns:r="http://schemas.openxmlformats.org/officeDocument/2006/relationships" xmlns:p="http://schemas.openxmlformats.org/presentationml/2006/main">
   <p:cSld>
     <p:bg>
       <p:bgPr>
@@ -4689,7 +4750,14 @@
         <p:cNvGrpSpPr/>
         <p:nvPr/>
       </p:nvGrpSpPr>
-      <p:grpSpPr/>
+      <p:grpSpPr>
+        <a:xfrm>
+          <a:off x="0" y="0"/>
+          <a:ext cx="0" cy="0"/>
+          <a:chOff x="0" y="0"/>
+          <a:chExt cx="0" cy="0"/>
+        </a:xfrm>
+      </p:grpSpPr>
       <p:sp>
         <p:nvSpPr>
           <p:cNvPr id="2" name="TextBox 1"/>
@@ -4874,7 +4942,7 @@
 </file>
 
 <file path=ppt/slides/slide2.xml><?xml version="1.0" encoding="utf-8"?>
-<p:sld xmlns:a="http://schemas.openxmlformats.org/drawingml/2006/main" xmlns:p="http://schemas.openxmlformats.org/presentationml/2006/main" xmlns:r="http://schemas.openxmlformats.org/officeDocument/2006/relationships">
+<p:sld xmlns:a="http://schemas.openxmlformats.org/drawingml/2006/main" xmlns:r="http://schemas.openxmlformats.org/officeDocument/2006/relationships" xmlns:p="http://schemas.openxmlformats.org/presentationml/2006/main">
   <p:cSld>
     <p:bg>
       <p:bgPr>
@@ -4890,7 +4958,14 @@
         <p:cNvGrpSpPr/>
         <p:nvPr/>
       </p:nvGrpSpPr>
-      <p:grpSpPr/>
+      <p:grpSpPr>
+        <a:xfrm>
+          <a:off x="0" y="0"/>
+          <a:ext cx="0" cy="0"/>
+          <a:chOff x="0" y="0"/>
+          <a:chExt cx="0" cy="0"/>
+        </a:xfrm>
+      </p:grpSpPr>
       <p:sp>
         <p:nvSpPr>
           <p:cNvPr id="2" name="TextBox 1"/>
@@ -4966,6 +5041,7 @@
           <a:lstStyle/>
           <a:p>
             <a:pPr algn="ctr"/>
+            <a:endParaRPr/>
           </a:p>
         </p:txBody>
       </p:sp>
@@ -5045,7 +5121,7 @@
           </a:fontRef>
         </p:style>
         <p:txBody>
-          <a:bodyPr rtlCol="0" anchor="ctr" wrap="square" lIns="152400" rIns="152400" tIns="101600" bIns="101600"/>
+          <a:bodyPr wrap="square" lIns="152400" tIns="101600" rIns="152400" bIns="101600" rtlCol="0" anchor="ctr"/>
           <a:lstStyle/>
           <a:p>
             <a:pPr algn="ctr">
@@ -5161,7 +5237,7 @@
           </a:fontRef>
         </p:style>
         <p:txBody>
-          <a:bodyPr rtlCol="0" anchor="ctr" wrap="square" lIns="152400" rIns="152400" tIns="101600" bIns="101600"/>
+          <a:bodyPr wrap="square" lIns="152400" tIns="101600" rIns="152400" bIns="101600" rtlCol="0" anchor="ctr"/>
           <a:lstStyle/>
           <a:p>
             <a:pPr algn="ctr">
@@ -5249,7 +5325,7 @@
         <p:spPr>
           <a:xfrm>
             <a:off x="548640" y="3657600"/>
-            <a:ext cx="8046720" cy="457200"/>
+            <a:ext cx="8046720" cy="307777"/>
           </a:xfrm>
           <a:prstGeom prst="rect">
             <a:avLst/>
@@ -5270,7 +5346,8 @@
               </a:defRPr>
             </a:pPr>
             <a:r>
-              <a:t>Dataset: ~2,993 stations  •  ~2,899 routes  •  ~18,588 journey records</a:t>
+              <a:rPr dirty="0"/>
+              <a:t>Dataset: 2,993 stations  •  2,899 routes  •  18,588 journey records</a:t>
             </a:r>
           </a:p>
         </p:txBody>
@@ -5284,7 +5361,7 @@
 </file>
 
 <file path=ppt/slides/slide3.xml><?xml version="1.0" encoding="utf-8"?>
-<p:sld xmlns:a="http://schemas.openxmlformats.org/drawingml/2006/main" xmlns:p="http://schemas.openxmlformats.org/presentationml/2006/main" xmlns:r="http://schemas.openxmlformats.org/officeDocument/2006/relationships">
+<p:sld xmlns:a="http://schemas.openxmlformats.org/drawingml/2006/main" xmlns:r="http://schemas.openxmlformats.org/officeDocument/2006/relationships" xmlns:p="http://schemas.openxmlformats.org/presentationml/2006/main">
   <p:cSld>
     <p:bg>
       <p:bgPr>
@@ -5300,7 +5377,14 @@
         <p:cNvGrpSpPr/>
         <p:nvPr/>
       </p:nvGrpSpPr>
-      <p:grpSpPr/>
+      <p:grpSpPr>
+        <a:xfrm>
+          <a:off x="0" y="0"/>
+          <a:ext cx="0" cy="0"/>
+          <a:chOff x="0" y="0"/>
+          <a:chExt cx="0" cy="0"/>
+        </a:xfrm>
+      </p:grpSpPr>
       <p:sp>
         <p:nvSpPr>
           <p:cNvPr id="2" name="TextBox 1"/>
@@ -5376,6 +5460,7 @@
           <a:lstStyle/>
           <a:p>
             <a:pPr algn="ctr"/>
+            <a:endParaRPr/>
           </a:p>
         </p:txBody>
       </p:sp>
@@ -5416,7 +5501,7 @@
           </a:fontRef>
         </p:style>
         <p:txBody>
-          <a:bodyPr rtlCol="0" anchor="ctr" wrap="square" lIns="152400" rIns="152400" tIns="101600" bIns="101600"/>
+          <a:bodyPr wrap="square" lIns="152400" tIns="101600" rIns="152400" bIns="101600" rtlCol="0" anchor="ctr"/>
           <a:lstStyle/>
           <a:p>
             <a:pPr algn="ctr">
@@ -5502,7 +5587,7 @@
           </a:fontRef>
         </p:style>
         <p:txBody>
-          <a:bodyPr rtlCol="0" anchor="ctr" wrap="square" lIns="152400" rIns="152400" tIns="101600" bIns="101600"/>
+          <a:bodyPr wrap="square" lIns="152400" tIns="101600" rIns="152400" bIns="101600" rtlCol="0" anchor="ctr"/>
           <a:lstStyle/>
           <a:p>
             <a:pPr algn="ctr">
@@ -5588,7 +5673,7 @@
           </a:fontRef>
         </p:style>
         <p:txBody>
-          <a:bodyPr rtlCol="0" anchor="ctr" wrap="square" lIns="152400" rIns="152400" tIns="101600" bIns="101600"/>
+          <a:bodyPr wrap="square" lIns="152400" tIns="101600" rIns="152400" bIns="101600" rtlCol="0" anchor="ctr"/>
           <a:lstStyle/>
           <a:p>
             <a:pPr algn="ctr">
@@ -5674,7 +5759,7 @@
           </a:fontRef>
         </p:style>
         <p:txBody>
-          <a:bodyPr rtlCol="0" anchor="ctr" wrap="square" lIns="152400" rIns="152400" tIns="101600" bIns="101600"/>
+          <a:bodyPr wrap="square" lIns="152400" tIns="101600" rIns="152400" bIns="101600" rtlCol="0" anchor="ctr"/>
           <a:lstStyle/>
           <a:p>
             <a:pPr algn="ctr">
@@ -5760,7 +5845,7 @@
           </a:fontRef>
         </p:style>
         <p:txBody>
-          <a:bodyPr rtlCol="0" anchor="ctr" wrap="square" lIns="152400" rIns="152400" tIns="101600" bIns="101600"/>
+          <a:bodyPr wrap="square" lIns="152400" tIns="101600" rIns="152400" bIns="101600" rtlCol="0" anchor="ctr"/>
           <a:lstStyle/>
           <a:p>
             <a:pPr algn="ctr">
@@ -5846,7 +5931,7 @@
           </a:fontRef>
         </p:style>
         <p:txBody>
-          <a:bodyPr rtlCol="0" anchor="ctr" wrap="square" lIns="152400" rIns="152400" tIns="101600" bIns="101600"/>
+          <a:bodyPr wrap="square" lIns="152400" tIns="101600" rIns="152400" bIns="101600" rtlCol="0" anchor="ctr"/>
           <a:lstStyle/>
           <a:p>
             <a:pPr algn="ctr">
@@ -5904,7 +5989,7 @@
 </file>
 
 <file path=ppt/slides/slide4.xml><?xml version="1.0" encoding="utf-8"?>
-<p:sld xmlns:a="http://schemas.openxmlformats.org/drawingml/2006/main" xmlns:p="http://schemas.openxmlformats.org/presentationml/2006/main" xmlns:r="http://schemas.openxmlformats.org/officeDocument/2006/relationships">
+<p:sld xmlns:a="http://schemas.openxmlformats.org/drawingml/2006/main" xmlns:r="http://schemas.openxmlformats.org/officeDocument/2006/relationships" xmlns:p="http://schemas.openxmlformats.org/presentationml/2006/main">
   <p:cSld>
     <p:bg>
       <p:bgPr>
@@ -5920,7 +6005,14 @@
         <p:cNvGrpSpPr/>
         <p:nvPr/>
       </p:nvGrpSpPr>
-      <p:grpSpPr/>
+      <p:grpSpPr>
+        <a:xfrm>
+          <a:off x="0" y="0"/>
+          <a:ext cx="0" cy="0"/>
+          <a:chOff x="0" y="0"/>
+          <a:chExt cx="0" cy="0"/>
+        </a:xfrm>
+      </p:grpSpPr>
       <p:sp>
         <p:nvSpPr>
           <p:cNvPr id="2" name="TextBox 1"/>
@@ -5996,6 +6088,7 @@
           <a:lstStyle/>
           <a:p>
             <a:pPr algn="ctr"/>
+            <a:endParaRPr/>
           </a:p>
         </p:txBody>
       </p:sp>
@@ -6070,7 +6163,7 @@
           </a:fontRef>
         </p:style>
         <p:txBody>
-          <a:bodyPr rtlCol="0" anchor="ctr" wrap="square" lIns="127000"/>
+          <a:bodyPr wrap="square" lIns="127000" rtlCol="0" anchor="ctr"/>
           <a:lstStyle/>
           <a:p>
             <a:pPr algn="ctr"/>
@@ -6133,6 +6226,7 @@
           <a:lstStyle/>
           <a:p>
             <a:pPr algn="ctr"/>
+            <a:endParaRPr/>
           </a:p>
         </p:txBody>
       </p:sp>
@@ -6172,7 +6266,7 @@
           </a:fontRef>
         </p:style>
         <p:txBody>
-          <a:bodyPr rtlCol="0" anchor="ctr" wrap="square" lIns="127000"/>
+          <a:bodyPr wrap="square" lIns="127000" rtlCol="0" anchor="ctr"/>
           <a:lstStyle/>
           <a:p>
             <a:pPr algn="ctr"/>
@@ -6235,6 +6329,7 @@
           <a:lstStyle/>
           <a:p>
             <a:pPr algn="ctr"/>
+            <a:endParaRPr/>
           </a:p>
         </p:txBody>
       </p:sp>
@@ -6274,7 +6369,7 @@
           </a:fontRef>
         </p:style>
         <p:txBody>
-          <a:bodyPr rtlCol="0" anchor="ctr" wrap="square" lIns="127000"/>
+          <a:bodyPr wrap="square" lIns="127000" rtlCol="0" anchor="ctr"/>
           <a:lstStyle/>
           <a:p>
             <a:pPr algn="ctr"/>
@@ -6337,6 +6432,7 @@
           <a:lstStyle/>
           <a:p>
             <a:pPr algn="ctr"/>
+            <a:endParaRPr/>
           </a:p>
         </p:txBody>
       </p:sp>
@@ -6376,7 +6472,7 @@
           </a:fontRef>
         </p:style>
         <p:txBody>
-          <a:bodyPr rtlCol="0" anchor="ctr" wrap="square" lIns="127000"/>
+          <a:bodyPr wrap="square" lIns="127000" rtlCol="0" anchor="ctr"/>
           <a:lstStyle/>
           <a:p>
             <a:pPr algn="ctr"/>
@@ -6407,7 +6503,7 @@
         </p:nvSpPr>
         <p:spPr>
           <a:xfrm>
-            <a:off x="548640" y="4206240"/>
+            <a:off x="3083683" y="4480560"/>
             <a:ext cx="3657600" cy="365760"/>
           </a:xfrm>
           <a:prstGeom prst="rect">
@@ -6429,42 +6525,8 @@
               </a:defRPr>
             </a:pPr>
             <a:r>
+              <a:rPr dirty="0"/>
               <a:t>Also: MCP server over same DB &amp; logic</a:t>
-            </a:r>
-          </a:p>
-        </p:txBody>
-      </p:sp>
-      <p:sp>
-        <p:nvSpPr>
-          <p:cNvPr id="13" name="TextBox 12"/>
-          <p:cNvSpPr txBox="1"/>
-          <p:nvPr/>
-        </p:nvSpPr>
-        <p:spPr>
-          <a:xfrm>
-            <a:off x="4572000" y="4206240"/>
-            <a:ext cx="4114800" cy="365760"/>
-          </a:xfrm>
-          <a:prstGeom prst="rect">
-            <a:avLst/>
-          </a:prstGeom>
-          <a:noFill/>
-        </p:spPr>
-        <p:txBody>
-          <a:bodyPr wrap="square">
-            <a:spAutoFit/>
-          </a:bodyPr>
-          <a:lstStyle/>
-          <a:p>
-            <a:pPr algn="l">
-              <a:defRPr sz="1300" b="0">
-                <a:solidFill>
-                  <a:srgbClr val="BBBBBB"/>
-                </a:solidFill>
-              </a:defRPr>
-            </a:pPr>
-            <a:r>
-              <a:t>core/  config • database • security • errors</a:t>
             </a:r>
           </a:p>
         </p:txBody>
@@ -6478,7 +6540,7 @@
 </file>
 
 <file path=ppt/slides/slide5.xml><?xml version="1.0" encoding="utf-8"?>
-<p:sld xmlns:a="http://schemas.openxmlformats.org/drawingml/2006/main" xmlns:p="http://schemas.openxmlformats.org/presentationml/2006/main" xmlns:r="http://schemas.openxmlformats.org/officeDocument/2006/relationships">
+<p:sld xmlns:a="http://schemas.openxmlformats.org/drawingml/2006/main" xmlns:r="http://schemas.openxmlformats.org/officeDocument/2006/relationships" xmlns:p="http://schemas.openxmlformats.org/presentationml/2006/main">
   <p:cSld>
     <p:bg>
       <p:bgPr>
@@ -6494,7 +6556,14 @@
         <p:cNvGrpSpPr/>
         <p:nvPr/>
       </p:nvGrpSpPr>
-      <p:grpSpPr/>
+      <p:grpSpPr>
+        <a:xfrm>
+          <a:off x="0" y="0"/>
+          <a:ext cx="0" cy="0"/>
+          <a:chOff x="0" y="0"/>
+          <a:chExt cx="0" cy="0"/>
+        </a:xfrm>
+      </p:grpSpPr>
       <p:sp>
         <p:nvSpPr>
           <p:cNvPr id="2" name="TextBox 1"/>
@@ -6570,6 +6639,7 @@
           <a:lstStyle/>
           <a:p>
             <a:pPr algn="ctr"/>
+            <a:endParaRPr/>
           </a:p>
         </p:txBody>
       </p:sp>
@@ -6610,7 +6680,7 @@
           </a:fontRef>
         </p:style>
         <p:txBody>
-          <a:bodyPr rtlCol="0" anchor="ctr" wrap="square" lIns="152400" rIns="152400" tIns="101600" bIns="101600"/>
+          <a:bodyPr wrap="square" lIns="152400" tIns="101600" rIns="152400" bIns="101600" rtlCol="0" anchor="ctr"/>
           <a:lstStyle/>
           <a:p>
             <a:pPr algn="ctr">
@@ -6696,7 +6766,7 @@
           </a:fontRef>
         </p:style>
         <p:txBody>
-          <a:bodyPr rtlCol="0" anchor="ctr" wrap="square" lIns="152400" rIns="152400" tIns="101600" bIns="101600"/>
+          <a:bodyPr wrap="square" lIns="152400" tIns="101600" rIns="152400" bIns="101600" rtlCol="0" anchor="ctr"/>
           <a:lstStyle/>
           <a:p>
             <a:pPr algn="ctr">
@@ -6782,7 +6852,7 @@
           </a:fontRef>
         </p:style>
         <p:txBody>
-          <a:bodyPr rtlCol="0" anchor="ctr" wrap="square" lIns="152400" rIns="152400" tIns="101600" bIns="101600"/>
+          <a:bodyPr wrap="square" lIns="152400" tIns="101600" rIns="152400" bIns="101600" rtlCol="0" anchor="ctr"/>
           <a:lstStyle/>
           <a:p>
             <a:pPr algn="ctr">
@@ -6868,7 +6938,7 @@
           </a:fontRef>
         </p:style>
         <p:txBody>
-          <a:bodyPr rtlCol="0" anchor="ctr" wrap="square" lIns="152400" rIns="152400" tIns="101600" bIns="101600"/>
+          <a:bodyPr wrap="square" lIns="152400" tIns="101600" rIns="152400" bIns="101600" rtlCol="0" anchor="ctr"/>
           <a:lstStyle/>
           <a:p>
             <a:pPr algn="ctr">
@@ -6997,7 +7067,7 @@
 </file>
 
 <file path=ppt/slides/slide6.xml><?xml version="1.0" encoding="utf-8"?>
-<p:sld xmlns:a="http://schemas.openxmlformats.org/drawingml/2006/main" xmlns:p="http://schemas.openxmlformats.org/presentationml/2006/main" xmlns:r="http://schemas.openxmlformats.org/officeDocument/2006/relationships">
+<p:sld xmlns:a="http://schemas.openxmlformats.org/drawingml/2006/main" xmlns:r="http://schemas.openxmlformats.org/officeDocument/2006/relationships" xmlns:p="http://schemas.openxmlformats.org/presentationml/2006/main">
   <p:cSld>
     <p:bg>
       <p:bgPr>
@@ -7013,7 +7083,14 @@
         <p:cNvGrpSpPr/>
         <p:nvPr/>
       </p:nvGrpSpPr>
-      <p:grpSpPr/>
+      <p:grpSpPr>
+        <a:xfrm>
+          <a:off x="0" y="0"/>
+          <a:ext cx="0" cy="0"/>
+          <a:chOff x="0" y="0"/>
+          <a:chExt cx="0" cy="0"/>
+        </a:xfrm>
+      </p:grpSpPr>
       <p:sp>
         <p:nvSpPr>
           <p:cNvPr id="2" name="TextBox 1"/>
@@ -7089,6 +7166,7 @@
           <a:lstStyle/>
           <a:p>
             <a:pPr algn="ctr"/>
+            <a:endParaRPr/>
           </a:p>
         </p:txBody>
       </p:sp>
@@ -7164,7 +7242,7 @@
           </a:fontRef>
         </p:style>
         <p:txBody>
-          <a:bodyPr rtlCol="0" anchor="ctr" wrap="square" lIns="152400" rIns="152400" tIns="101600" bIns="101600"/>
+          <a:bodyPr wrap="square" lIns="152400" tIns="101600" rIns="152400" bIns="101600" rtlCol="0" anchor="ctr"/>
           <a:lstStyle/>
           <a:p>
             <a:pPr algn="ctr">
@@ -7265,7 +7343,7 @@
           </a:fontRef>
         </p:style>
         <p:txBody>
-          <a:bodyPr rtlCol="0" anchor="ctr" wrap="square" lIns="152400" rIns="152400" tIns="101600" bIns="101600"/>
+          <a:bodyPr wrap="square" lIns="152400" tIns="101600" rIns="152400" bIns="101600" rtlCol="0" anchor="ctr"/>
           <a:lstStyle/>
           <a:p>
             <a:pPr algn="ctr">
@@ -7474,7 +7552,7 @@
 </file>
 
 <file path=ppt/slides/slide7.xml><?xml version="1.0" encoding="utf-8"?>
-<p:sld xmlns:a="http://schemas.openxmlformats.org/drawingml/2006/main" xmlns:p="http://schemas.openxmlformats.org/presentationml/2006/main" xmlns:r="http://schemas.openxmlformats.org/officeDocument/2006/relationships">
+<p:sld xmlns:a="http://schemas.openxmlformats.org/drawingml/2006/main" xmlns:r="http://schemas.openxmlformats.org/officeDocument/2006/relationships" xmlns:p="http://schemas.openxmlformats.org/presentationml/2006/main">
   <p:cSld>
     <p:bg>
       <p:bgPr>
@@ -7490,7 +7568,14 @@
         <p:cNvGrpSpPr/>
         <p:nvPr/>
       </p:nvGrpSpPr>
-      <p:grpSpPr/>
+      <p:grpSpPr>
+        <a:xfrm>
+          <a:off x="0" y="0"/>
+          <a:ext cx="0" cy="0"/>
+          <a:chOff x="0" y="0"/>
+          <a:chExt cx="0" cy="0"/>
+        </a:xfrm>
+      </p:grpSpPr>
       <p:sp>
         <p:nvSpPr>
           <p:cNvPr id="2" name="TextBox 1"/>
@@ -7566,6 +7651,7 @@
           <a:lstStyle/>
           <a:p>
             <a:pPr algn="ctr"/>
+            <a:endParaRPr/>
           </a:p>
         </p:txBody>
       </p:sp>
@@ -7641,7 +7727,7 @@
           </a:fontRef>
         </p:style>
         <p:txBody>
-          <a:bodyPr rtlCol="0" anchor="ctr" wrap="square" lIns="152400" rIns="152400" tIns="101600" bIns="101600"/>
+          <a:bodyPr wrap="square" lIns="152400" tIns="101600" rIns="152400" bIns="101600" rtlCol="0" anchor="ctr"/>
           <a:lstStyle/>
           <a:p>
             <a:pPr algn="ctr">
@@ -7802,7 +7888,7 @@
           </a:fontRef>
         </p:style>
         <p:txBody>
-          <a:bodyPr rtlCol="0" anchor="ctr" wrap="square" lIns="152400" rIns="152400" tIns="101600" bIns="101600"/>
+          <a:bodyPr wrap="square" lIns="152400" tIns="101600" rIns="152400" bIns="101600" rtlCol="0" anchor="ctr"/>
           <a:lstStyle/>
           <a:p>
             <a:pPr algn="ctr">
@@ -7890,6 +7976,7 @@
                 </a:solidFill>
               </a:defRPr>
             </a:pPr>
+            <a:endParaRPr/>
           </a:p>
           <a:p>
             <a:pPr>
@@ -7967,7 +8054,7 @@
 </file>
 
 <file path=ppt/slides/slide8.xml><?xml version="1.0" encoding="utf-8"?>
-<p:sld xmlns:a="http://schemas.openxmlformats.org/drawingml/2006/main" xmlns:p="http://schemas.openxmlformats.org/presentationml/2006/main" xmlns:r="http://schemas.openxmlformats.org/officeDocument/2006/relationships">
+<p:sld xmlns:a="http://schemas.openxmlformats.org/drawingml/2006/main" xmlns:r="http://schemas.openxmlformats.org/officeDocument/2006/relationships" xmlns:p="http://schemas.openxmlformats.org/presentationml/2006/main">
   <p:cSld>
     <p:bg>
       <p:bgPr>
@@ -7983,7 +8070,14 @@
         <p:cNvGrpSpPr/>
         <p:nvPr/>
       </p:nvGrpSpPr>
-      <p:grpSpPr/>
+      <p:grpSpPr>
+        <a:xfrm>
+          <a:off x="0" y="0"/>
+          <a:ext cx="0" cy="0"/>
+          <a:chOff x="0" y="0"/>
+          <a:chExt cx="0" cy="0"/>
+        </a:xfrm>
+      </p:grpSpPr>
       <p:sp>
         <p:nvSpPr>
           <p:cNvPr id="2" name="TextBox 1"/>
@@ -8059,6 +8153,7 @@
           <a:lstStyle/>
           <a:p>
             <a:pPr algn="ctr"/>
+            <a:endParaRPr/>
           </a:p>
         </p:txBody>
       </p:sp>
@@ -8586,7 +8681,7 @@
 </file>
 
 <file path=ppt/slides/slide9.xml><?xml version="1.0" encoding="utf-8"?>
-<p:sld xmlns:a="http://schemas.openxmlformats.org/drawingml/2006/main" xmlns:p="http://schemas.openxmlformats.org/presentationml/2006/main" xmlns:r="http://schemas.openxmlformats.org/officeDocument/2006/relationships">
+<p:sld xmlns:a="http://schemas.openxmlformats.org/drawingml/2006/main" xmlns:r="http://schemas.openxmlformats.org/officeDocument/2006/relationships" xmlns:p="http://schemas.openxmlformats.org/presentationml/2006/main">
   <p:cSld>
     <p:bg>
       <p:bgPr>
@@ -8602,7 +8697,14 @@
         <p:cNvGrpSpPr/>
         <p:nvPr/>
       </p:nvGrpSpPr>
-      <p:grpSpPr/>
+      <p:grpSpPr>
+        <a:xfrm>
+          <a:off x="0" y="0"/>
+          <a:ext cx="0" cy="0"/>
+          <a:chOff x="0" y="0"/>
+          <a:chExt cx="0" cy="0"/>
+        </a:xfrm>
+      </p:grpSpPr>
       <p:sp>
         <p:nvSpPr>
           <p:cNvPr id="2" name="TextBox 1"/>
@@ -8678,6 +8780,7 @@
           <a:lstStyle/>
           <a:p>
             <a:pPr algn="ctr"/>
+            <a:endParaRPr/>
           </a:p>
         </p:txBody>
       </p:sp>
@@ -8718,7 +8821,7 @@
           </a:fontRef>
         </p:style>
         <p:txBody>
-          <a:bodyPr rtlCol="0" anchor="ctr" wrap="square" lIns="152400" rIns="152400" tIns="101600" bIns="101600"/>
+          <a:bodyPr wrap="square" lIns="152400" tIns="101600" rIns="152400" bIns="101600" rtlCol="0" anchor="ctr"/>
           <a:lstStyle/>
           <a:p>
             <a:pPr algn="ctr">
@@ -8879,7 +8982,7 @@
           </a:fontRef>
         </p:style>
         <p:txBody>
-          <a:bodyPr rtlCol="0" anchor="ctr" wrap="square" lIns="152400" rIns="152400" tIns="101600" bIns="101600"/>
+          <a:bodyPr wrap="square" lIns="152400" tIns="101600" rIns="152400" bIns="101600" rtlCol="0" anchor="ctr"/>
           <a:lstStyle/>
           <a:p>
             <a:pPr algn="ctr">
@@ -8997,6 +9100,7 @@
                 </a:solidFill>
               </a:defRPr>
             </a:pPr>
+            <a:endParaRPr/>
           </a:p>
         </p:txBody>
       </p:sp>
@@ -9009,7 +9113,7 @@
         <p:spPr>
           <a:xfrm>
             <a:off x="548640" y="3474720"/>
-            <a:ext cx="8046720" cy="548640"/>
+            <a:ext cx="8046720" cy="307777"/>
           </a:xfrm>
           <a:prstGeom prst="rect">
             <a:avLst/>
@@ -9030,10 +9134,15 @@
               </a:defRPr>
             </a:pPr>
             <a:r>
-              <a:t>Intentionally proportionate for coursework scope —</a:t>
-            </a:r>
-            <a:br/>
-            <a:r>
+              <a:rPr dirty="0"/>
+              <a:t>Intentionally proportionate for coursework scope </a:t>
+            </a:r>
+            <a:r>
+              <a:rPr lang="en-GB" dirty="0"/>
+              <a:t>- </a:t>
+            </a:r>
+            <a:r>
+              <a:rPr dirty="0"/>
               <a:t>not a production security system, but not absent either.</a:t>
             </a:r>
           </a:p>
